--- a/Projeto de Software e Segurança da Informação - 2025/Segurança da Informação/Aula 01 - Pilares da Segurança da Informação/Pilares.pptx
+++ b/Projeto de Software e Segurança da Informação - 2025/Segurança da Informação/Aula 01 - Pilares da Segurança da Informação/Pilares.pptx
@@ -5,38 +5,40 @@
     <p:sldMasterId id="2147483659" r:id="rId1"/>
   </p:sldMasterIdLst>
   <p:notesMasterIdLst>
-    <p:notesMasterId r:id="rId31"/>
+    <p:notesMasterId r:id="rId33"/>
   </p:notesMasterIdLst>
   <p:sldIdLst>
     <p:sldId id="256" r:id="rId2"/>
-    <p:sldId id="276" r:id="rId3"/>
-    <p:sldId id="277" r:id="rId4"/>
-    <p:sldId id="278" r:id="rId5"/>
-    <p:sldId id="279" r:id="rId6"/>
-    <p:sldId id="280" r:id="rId7"/>
-    <p:sldId id="281" r:id="rId8"/>
-    <p:sldId id="282" r:id="rId9"/>
-    <p:sldId id="283" r:id="rId10"/>
-    <p:sldId id="284" r:id="rId11"/>
-    <p:sldId id="285" r:id="rId12"/>
-    <p:sldId id="259" r:id="rId13"/>
-    <p:sldId id="286" r:id="rId14"/>
-    <p:sldId id="260" r:id="rId15"/>
-    <p:sldId id="261" r:id="rId16"/>
-    <p:sldId id="262" r:id="rId17"/>
-    <p:sldId id="263" r:id="rId18"/>
-    <p:sldId id="264" r:id="rId19"/>
-    <p:sldId id="271" r:id="rId20"/>
-    <p:sldId id="265" r:id="rId21"/>
-    <p:sldId id="266" r:id="rId22"/>
-    <p:sldId id="267" r:id="rId23"/>
-    <p:sldId id="268" r:id="rId24"/>
-    <p:sldId id="269" r:id="rId25"/>
-    <p:sldId id="270" r:id="rId26"/>
-    <p:sldId id="272" r:id="rId27"/>
-    <p:sldId id="273" r:id="rId28"/>
-    <p:sldId id="274" r:id="rId29"/>
-    <p:sldId id="275" r:id="rId30"/>
+    <p:sldId id="288" r:id="rId3"/>
+    <p:sldId id="287" r:id="rId4"/>
+    <p:sldId id="276" r:id="rId5"/>
+    <p:sldId id="277" r:id="rId6"/>
+    <p:sldId id="278" r:id="rId7"/>
+    <p:sldId id="279" r:id="rId8"/>
+    <p:sldId id="280" r:id="rId9"/>
+    <p:sldId id="281" r:id="rId10"/>
+    <p:sldId id="282" r:id="rId11"/>
+    <p:sldId id="283" r:id="rId12"/>
+    <p:sldId id="284" r:id="rId13"/>
+    <p:sldId id="285" r:id="rId14"/>
+    <p:sldId id="259" r:id="rId15"/>
+    <p:sldId id="286" r:id="rId16"/>
+    <p:sldId id="260" r:id="rId17"/>
+    <p:sldId id="261" r:id="rId18"/>
+    <p:sldId id="262" r:id="rId19"/>
+    <p:sldId id="263" r:id="rId20"/>
+    <p:sldId id="264" r:id="rId21"/>
+    <p:sldId id="271" r:id="rId22"/>
+    <p:sldId id="265" r:id="rId23"/>
+    <p:sldId id="266" r:id="rId24"/>
+    <p:sldId id="267" r:id="rId25"/>
+    <p:sldId id="268" r:id="rId26"/>
+    <p:sldId id="269" r:id="rId27"/>
+    <p:sldId id="270" r:id="rId28"/>
+    <p:sldId id="272" r:id="rId29"/>
+    <p:sldId id="273" r:id="rId30"/>
+    <p:sldId id="274" r:id="rId31"/>
+    <p:sldId id="275" r:id="rId32"/>
   </p:sldIdLst>
   <p:sldSz cx="12192000" cy="6858000"/>
   <p:notesSz cx="6858000" cy="9144000"/>
@@ -1868,6 +1870,110 @@
   <p:cSld>
     <p:spTree>
       <p:nvGrpSpPr>
+        <p:cNvPr id="1" name="Shape 195"/>
+        <p:cNvGrpSpPr/>
+        <p:nvPr/>
+      </p:nvGrpSpPr>
+      <p:grpSpPr>
+        <a:xfrm>
+          <a:off x="0" y="0"/>
+          <a:ext cx="0" cy="0"/>
+          <a:chOff x="0" y="0"/>
+          <a:chExt cx="0" cy="0"/>
+        </a:xfrm>
+      </p:grpSpPr>
+      <p:sp>
+        <p:nvSpPr>
+          <p:cNvPr id="196" name="Google Shape;196;p11:notes"/>
+          <p:cNvSpPr txBox="1">
+            <a:spLocks noGrp="1"/>
+          </p:cNvSpPr>
+          <p:nvPr>
+            <p:ph type="body" idx="1"/>
+          </p:nvPr>
+        </p:nvSpPr>
+        <p:spPr>
+          <a:xfrm>
+            <a:off x="685800" y="4400550"/>
+            <a:ext cx="5486400" cy="3600450"/>
+          </a:xfrm>
+          <a:prstGeom prst="rect">
+            <a:avLst/>
+          </a:prstGeom>
+        </p:spPr>
+        <p:txBody>
+          <a:bodyPr spcFirstLastPara="1" wrap="square" lIns="91425" tIns="45700" rIns="91425" bIns="45700" anchor="t" anchorCtr="0">
+            <a:noAutofit/>
+          </a:bodyPr>
+          <a:lstStyle/>
+          <a:p>
+            <a:pPr marL="0" lvl="0" indent="0" algn="l" rtl="0">
+              <a:spcBef>
+                <a:spcPts val="0"/>
+              </a:spcBef>
+              <a:spcAft>
+                <a:spcPts val="0"/>
+              </a:spcAft>
+              <a:buNone/>
+            </a:pPr>
+            <a:endParaRPr/>
+          </a:p>
+        </p:txBody>
+      </p:sp>
+      <p:sp>
+        <p:nvSpPr>
+          <p:cNvPr id="197" name="Google Shape;197;p11:notes"/>
+          <p:cNvSpPr>
+            <a:spLocks noGrp="1" noRot="1" noChangeAspect="1"/>
+          </p:cNvSpPr>
+          <p:nvPr>
+            <p:ph type="sldImg" idx="2"/>
+          </p:nvPr>
+        </p:nvSpPr>
+        <p:spPr>
+          <a:xfrm>
+            <a:off x="685800" y="1143000"/>
+            <a:ext cx="5486400" cy="3086100"/>
+          </a:xfrm>
+          <a:custGeom>
+            <a:avLst/>
+            <a:gdLst/>
+            <a:ahLst/>
+            <a:cxnLst/>
+            <a:rect l="l" t="t" r="r" b="b"/>
+            <a:pathLst>
+              <a:path w="120000" h="120000" extrusionOk="0">
+                <a:moveTo>
+                  <a:pt x="0" y="0"/>
+                </a:moveTo>
+                <a:lnTo>
+                  <a:pt x="120000" y="0"/>
+                </a:lnTo>
+                <a:lnTo>
+                  <a:pt x="120000" y="120000"/>
+                </a:lnTo>
+                <a:lnTo>
+                  <a:pt x="0" y="120000"/>
+                </a:lnTo>
+                <a:close/>
+              </a:path>
+            </a:pathLst>
+          </a:custGeom>
+        </p:spPr>
+      </p:sp>
+    </p:spTree>
+  </p:cSld>
+  <p:clrMapOvr>
+    <a:masterClrMapping/>
+  </p:clrMapOvr>
+</p:notes>
+</file>
+
+<file path=ppt/notesSlides/notesSlide11.xml><?xml version="1.0" encoding="utf-8"?>
+<p:notes xmlns:a="http://schemas.openxmlformats.org/drawingml/2006/main" xmlns:r="http://schemas.openxmlformats.org/officeDocument/2006/relationships" xmlns:p="http://schemas.openxmlformats.org/presentationml/2006/main" showMasterSp="0" showMasterPhAnim="0">
+  <p:cSld>
+    <p:spTree>
+      <p:nvGrpSpPr>
         <p:cNvPr id="1" name="Shape 228"/>
         <p:cNvGrpSpPr/>
         <p:nvPr/>
@@ -1967,7 +2073,7 @@
 </p:notes>
 </file>
 
-<file path=ppt/notesSlides/notesSlide11.xml><?xml version="1.0" encoding="utf-8"?>
+<file path=ppt/notesSlides/notesSlide12.xml><?xml version="1.0" encoding="utf-8"?>
 <p:notes xmlns:a="http://schemas.openxmlformats.org/drawingml/2006/main" xmlns:r="http://schemas.openxmlformats.org/officeDocument/2006/relationships" xmlns:p="http://schemas.openxmlformats.org/presentationml/2006/main" showMasterSp="0" showMasterPhAnim="0">
   <p:cSld>
     <p:spTree>
@@ -2071,7 +2177,7 @@
 </p:notes>
 </file>
 
-<file path=ppt/notesSlides/notesSlide12.xml><?xml version="1.0" encoding="utf-8"?>
+<file path=ppt/notesSlides/notesSlide13.xml><?xml version="1.0" encoding="utf-8"?>
 <p:notes xmlns:a="http://schemas.openxmlformats.org/drawingml/2006/main" xmlns:r="http://schemas.openxmlformats.org/officeDocument/2006/relationships" xmlns:p="http://schemas.openxmlformats.org/presentationml/2006/main" showMasterSp="0" showMasterPhAnim="0">
   <p:cSld>
     <p:spTree>
@@ -2175,7 +2281,7 @@
 </p:notes>
 </file>
 
-<file path=ppt/notesSlides/notesSlide13.xml><?xml version="1.0" encoding="utf-8"?>
+<file path=ppt/notesSlides/notesSlide14.xml><?xml version="1.0" encoding="utf-8"?>
 <p:notes xmlns:a="http://schemas.openxmlformats.org/drawingml/2006/main" xmlns:r="http://schemas.openxmlformats.org/officeDocument/2006/relationships" xmlns:p="http://schemas.openxmlformats.org/presentationml/2006/main" showMasterSp="0" showMasterPhAnim="0">
   <p:cSld>
     <p:spTree>
@@ -2280,6 +2386,123 @@
 </file>
 
 <file path=ppt/notesSlides/notesSlide2.xml><?xml version="1.0" encoding="utf-8"?>
+<p:notes xmlns:a="http://schemas.openxmlformats.org/drawingml/2006/main" xmlns:r="http://schemas.openxmlformats.org/officeDocument/2006/relationships" xmlns:p="http://schemas.openxmlformats.org/presentationml/2006/main">
+  <p:cSld>
+    <p:spTree>
+      <p:nvGrpSpPr>
+        <p:cNvPr id="1" name=""/>
+        <p:cNvGrpSpPr/>
+        <p:nvPr/>
+      </p:nvGrpSpPr>
+      <p:grpSpPr>
+        <a:xfrm>
+          <a:off x="0" y="0"/>
+          <a:ext cx="0" cy="0"/>
+          <a:chOff x="0" y="0"/>
+          <a:chExt cx="0" cy="0"/>
+        </a:xfrm>
+      </p:grpSpPr>
+      <p:sp>
+        <p:nvSpPr>
+          <p:cNvPr id="2" name="Espaço Reservado para Imagem de Slide 1"/>
+          <p:cNvSpPr>
+            <a:spLocks noGrp="1" noRot="1" noChangeAspect="1"/>
+          </p:cNvSpPr>
+          <p:nvPr>
+            <p:ph type="sldImg"/>
+          </p:nvPr>
+        </p:nvSpPr>
+        <p:spPr/>
+      </p:sp>
+      <p:sp>
+        <p:nvSpPr>
+          <p:cNvPr id="3" name="Espaço Reservado para Anotações 2"/>
+          <p:cNvSpPr>
+            <a:spLocks noGrp="1"/>
+          </p:cNvSpPr>
+          <p:nvPr>
+            <p:ph type="body" idx="1"/>
+          </p:nvPr>
+        </p:nvSpPr>
+        <p:spPr/>
+        <p:txBody>
+          <a:bodyPr/>
+          <a:lstStyle/>
+          <a:p>
+            <a:endParaRPr lang="pt-BR" dirty="0"/>
+          </a:p>
+        </p:txBody>
+      </p:sp>
+      <p:sp>
+        <p:nvSpPr>
+          <p:cNvPr id="4" name="Espaço Reservado para Número de Slide 3"/>
+          <p:cNvSpPr>
+            <a:spLocks noGrp="1"/>
+          </p:cNvSpPr>
+          <p:nvPr>
+            <p:ph type="sldNum" idx="12"/>
+          </p:nvPr>
+        </p:nvSpPr>
+        <p:spPr/>
+        <p:txBody>
+          <a:bodyPr/>
+          <a:lstStyle/>
+          <a:p>
+            <a:pPr marL="0" marR="0" lvl="0" indent="0" algn="r" rtl="0">
+              <a:lnSpc>
+                <a:spcPct val="100000"/>
+              </a:lnSpc>
+              <a:spcBef>
+                <a:spcPts val="0"/>
+              </a:spcBef>
+              <a:spcAft>
+                <a:spcPts val="0"/>
+              </a:spcAft>
+              <a:buClr>
+                <a:srgbClr val="000000"/>
+              </a:buClr>
+              <a:buSzPts val="1200"/>
+              <a:buFont typeface="Arial"/>
+              <a:buNone/>
+            </a:pPr>
+            <a:fld id="{00000000-1234-1234-1234-123412341234}" type="slidenum">
+              <a:rPr lang="pt-BR" sz="1200" b="0" i="0" u="none" strike="noStrike" cap="none" smtClean="0">
+                <a:solidFill>
+                  <a:schemeClr val="dk1"/>
+                </a:solidFill>
+                <a:latin typeface="Calibri"/>
+                <a:ea typeface="Calibri"/>
+                <a:cs typeface="Calibri"/>
+                <a:sym typeface="Calibri"/>
+              </a:rPr>
+              <a:t>5</a:t>
+            </a:fld>
+            <a:endParaRPr lang="pt-BR" sz="1200" b="0" i="0" u="none" strike="noStrike" cap="none">
+              <a:solidFill>
+                <a:schemeClr val="dk1"/>
+              </a:solidFill>
+              <a:latin typeface="Calibri"/>
+              <a:ea typeface="Calibri"/>
+              <a:cs typeface="Calibri"/>
+              <a:sym typeface="Calibri"/>
+            </a:endParaRPr>
+          </a:p>
+        </p:txBody>
+      </p:sp>
+    </p:spTree>
+    <p:extLst>
+      <p:ext uri="{BB962C8B-B14F-4D97-AF65-F5344CB8AC3E}">
+        <p14:creationId xmlns:p14="http://schemas.microsoft.com/office/powerpoint/2010/main" val="1995396908"/>
+      </p:ext>
+    </p:extLst>
+  </p:cSld>
+  <p:clrMapOvr>
+    <a:masterClrMapping/>
+  </p:clrMapOvr>
+</p:notes>
+</file>
+
+<file path=ppt/notesSlides/notesSlide3.xml><?xml version="1.0" encoding="utf-8"?>
 <p:notes xmlns:a="http://schemas.openxmlformats.org/drawingml/2006/main" xmlns:r="http://schemas.openxmlformats.org/officeDocument/2006/relationships" xmlns:p="http://schemas.openxmlformats.org/presentationml/2006/main" showMasterSp="0" showMasterPhAnim="0">
   <p:cSld>
     <p:spTree>
@@ -2401,7 +2624,7 @@
 </p:notes>
 </file>
 
-<file path=ppt/notesSlides/notesSlide3.xml><?xml version="1.0" encoding="utf-8"?>
+<file path=ppt/notesSlides/notesSlide4.xml><?xml version="1.0" encoding="utf-8"?>
 <p:notes xmlns:a="http://schemas.openxmlformats.org/drawingml/2006/main" xmlns:r="http://schemas.openxmlformats.org/officeDocument/2006/relationships" xmlns:p="http://schemas.openxmlformats.org/presentationml/2006/main" showMasterSp="0" showMasterPhAnim="0">
   <p:cSld>
     <p:spTree>
@@ -2523,7 +2746,7 @@
 </p:notes>
 </file>
 
-<file path=ppt/notesSlides/notesSlide4.xml><?xml version="1.0" encoding="utf-8"?>
+<file path=ppt/notesSlides/notesSlide5.xml><?xml version="1.0" encoding="utf-8"?>
 <p:notes xmlns:a="http://schemas.openxmlformats.org/drawingml/2006/main" xmlns:r="http://schemas.openxmlformats.org/officeDocument/2006/relationships" xmlns:p="http://schemas.openxmlformats.org/presentationml/2006/main" showMasterSp="0" showMasterPhAnim="0">
   <p:cSld>
     <p:spTree>
@@ -2645,7 +2868,7 @@
 </p:notes>
 </file>
 
-<file path=ppt/notesSlides/notesSlide5.xml><?xml version="1.0" encoding="utf-8"?>
+<file path=ppt/notesSlides/notesSlide6.xml><?xml version="1.0" encoding="utf-8"?>
 <p:notes xmlns:a="http://schemas.openxmlformats.org/drawingml/2006/main" xmlns:r="http://schemas.openxmlformats.org/officeDocument/2006/relationships" xmlns:p="http://schemas.openxmlformats.org/presentationml/2006/main" showMasterSp="0" showMasterPhAnim="0">
   <p:cSld>
     <p:spTree>
@@ -2767,7 +2990,7 @@
 </p:notes>
 </file>
 
-<file path=ppt/notesSlides/notesSlide6.xml><?xml version="1.0" encoding="utf-8"?>
+<file path=ppt/notesSlides/notesSlide7.xml><?xml version="1.0" encoding="utf-8"?>
 <p:notes xmlns:a="http://schemas.openxmlformats.org/drawingml/2006/main" xmlns:r="http://schemas.openxmlformats.org/officeDocument/2006/relationships" xmlns:p="http://schemas.openxmlformats.org/presentationml/2006/main" showMasterSp="0" showMasterPhAnim="0">
   <p:cSld>
     <p:spTree>
@@ -2871,7 +3094,7 @@
 </p:notes>
 </file>
 
-<file path=ppt/notesSlides/notesSlide7.xml><?xml version="1.0" encoding="utf-8"?>
+<file path=ppt/notesSlides/notesSlide8.xml><?xml version="1.0" encoding="utf-8"?>
 <p:notes xmlns:a="http://schemas.openxmlformats.org/drawingml/2006/main" xmlns:r="http://schemas.openxmlformats.org/officeDocument/2006/relationships" xmlns:p="http://schemas.openxmlformats.org/presentationml/2006/main" showMasterSp="0" showMasterPhAnim="0">
   <p:cSld>
     <p:spTree>
@@ -2975,7 +3198,7 @@
 </p:notes>
 </file>
 
-<file path=ppt/notesSlides/notesSlide8.xml><?xml version="1.0" encoding="utf-8"?>
+<file path=ppt/notesSlides/notesSlide9.xml><?xml version="1.0" encoding="utf-8"?>
 <p:notes xmlns:a="http://schemas.openxmlformats.org/drawingml/2006/main" xmlns:r="http://schemas.openxmlformats.org/officeDocument/2006/relationships" xmlns:p="http://schemas.openxmlformats.org/presentationml/2006/main" showMasterSp="0" showMasterPhAnim="0">
   <p:cSld>
     <p:spTree>
@@ -3033,110 +3256,6 @@
       <p:sp>
         <p:nvSpPr>
           <p:cNvPr id="179" name="Google Shape;179;p10:notes"/>
-          <p:cNvSpPr>
-            <a:spLocks noGrp="1" noRot="1" noChangeAspect="1"/>
-          </p:cNvSpPr>
-          <p:nvPr>
-            <p:ph type="sldImg" idx="2"/>
-          </p:nvPr>
-        </p:nvSpPr>
-        <p:spPr>
-          <a:xfrm>
-            <a:off x="685800" y="1143000"/>
-            <a:ext cx="5486400" cy="3086100"/>
-          </a:xfrm>
-          <a:custGeom>
-            <a:avLst/>
-            <a:gdLst/>
-            <a:ahLst/>
-            <a:cxnLst/>
-            <a:rect l="l" t="t" r="r" b="b"/>
-            <a:pathLst>
-              <a:path w="120000" h="120000" extrusionOk="0">
-                <a:moveTo>
-                  <a:pt x="0" y="0"/>
-                </a:moveTo>
-                <a:lnTo>
-                  <a:pt x="120000" y="0"/>
-                </a:lnTo>
-                <a:lnTo>
-                  <a:pt x="120000" y="120000"/>
-                </a:lnTo>
-                <a:lnTo>
-                  <a:pt x="0" y="120000"/>
-                </a:lnTo>
-                <a:close/>
-              </a:path>
-            </a:pathLst>
-          </a:custGeom>
-        </p:spPr>
-      </p:sp>
-    </p:spTree>
-  </p:cSld>
-  <p:clrMapOvr>
-    <a:masterClrMapping/>
-  </p:clrMapOvr>
-</p:notes>
-</file>
-
-<file path=ppt/notesSlides/notesSlide9.xml><?xml version="1.0" encoding="utf-8"?>
-<p:notes xmlns:a="http://schemas.openxmlformats.org/drawingml/2006/main" xmlns:r="http://schemas.openxmlformats.org/officeDocument/2006/relationships" xmlns:p="http://schemas.openxmlformats.org/presentationml/2006/main" showMasterSp="0" showMasterPhAnim="0">
-  <p:cSld>
-    <p:spTree>
-      <p:nvGrpSpPr>
-        <p:cNvPr id="1" name="Shape 195"/>
-        <p:cNvGrpSpPr/>
-        <p:nvPr/>
-      </p:nvGrpSpPr>
-      <p:grpSpPr>
-        <a:xfrm>
-          <a:off x="0" y="0"/>
-          <a:ext cx="0" cy="0"/>
-          <a:chOff x="0" y="0"/>
-          <a:chExt cx="0" cy="0"/>
-        </a:xfrm>
-      </p:grpSpPr>
-      <p:sp>
-        <p:nvSpPr>
-          <p:cNvPr id="196" name="Google Shape;196;p11:notes"/>
-          <p:cNvSpPr txBox="1">
-            <a:spLocks noGrp="1"/>
-          </p:cNvSpPr>
-          <p:nvPr>
-            <p:ph type="body" idx="1"/>
-          </p:nvPr>
-        </p:nvSpPr>
-        <p:spPr>
-          <a:xfrm>
-            <a:off x="685800" y="4400550"/>
-            <a:ext cx="5486400" cy="3600450"/>
-          </a:xfrm>
-          <a:prstGeom prst="rect">
-            <a:avLst/>
-          </a:prstGeom>
-        </p:spPr>
-        <p:txBody>
-          <a:bodyPr spcFirstLastPara="1" wrap="square" lIns="91425" tIns="45700" rIns="91425" bIns="45700" anchor="t" anchorCtr="0">
-            <a:noAutofit/>
-          </a:bodyPr>
-          <a:lstStyle/>
-          <a:p>
-            <a:pPr marL="0" lvl="0" indent="0" algn="l" rtl="0">
-              <a:spcBef>
-                <a:spcPts val="0"/>
-              </a:spcBef>
-              <a:spcAft>
-                <a:spcPts val="0"/>
-              </a:spcAft>
-              <a:buNone/>
-            </a:pPr>
-            <a:endParaRPr/>
-          </a:p>
-        </p:txBody>
-      </p:sp>
-      <p:sp>
-        <p:nvSpPr>
-          <p:cNvPr id="197" name="Google Shape;197;p11:notes"/>
           <p:cNvSpPr>
             <a:spLocks noGrp="1" noRot="1" noChangeAspect="1"/>
           </p:cNvSpPr>
@@ -17321,26 +17440,12 @@
           </a:bodyPr>
           <a:lstStyle/>
           <a:p>
-            <a:pPr marL="0" lvl="0" indent="0" algn="ctr" rtl="0">
-              <a:lnSpc>
-                <a:spcPct val="90000"/>
-              </a:lnSpc>
-              <a:spcBef>
-                <a:spcPts val="0"/>
-              </a:spcBef>
-              <a:spcAft>
-                <a:spcPts val="0"/>
-              </a:spcAft>
-              <a:buClr>
-                <a:schemeClr val="dk1"/>
-              </a:buClr>
+            <a:pPr lvl="0">
               <a:buSzPts val="4800"/>
-              <a:buFont typeface="Times New Roman"/>
-              <a:buNone/>
             </a:pPr>
             <a:r>
               <a:rPr lang="pt-BR" sz="4800" dirty="0"/>
-              <a:t>Segurança da Informação</a:t>
+              <a:t>Fundamentos da Segurança da Informação</a:t>
             </a:r>
             <a:endParaRPr dirty="0"/>
           </a:p>
@@ -17408,6 +17513,222 @@
 </file>
 
 <file path=ppt/slides/slide10.xml><?xml version="1.0" encoding="utf-8"?>
+<p:sld xmlns:a="http://schemas.openxmlformats.org/drawingml/2006/main" xmlns:r="http://schemas.openxmlformats.org/officeDocument/2006/relationships" xmlns:p="http://schemas.openxmlformats.org/presentationml/2006/main">
+  <p:cSld>
+    <p:spTree>
+      <p:nvGrpSpPr>
+        <p:cNvPr id="1" name=""/>
+        <p:cNvGrpSpPr/>
+        <p:nvPr/>
+      </p:nvGrpSpPr>
+      <p:grpSpPr>
+        <a:xfrm>
+          <a:off x="0" y="0"/>
+          <a:ext cx="0" cy="0"/>
+          <a:chOff x="0" y="0"/>
+          <a:chExt cx="0" cy="0"/>
+        </a:xfrm>
+      </p:grpSpPr>
+      <p:sp>
+        <p:nvSpPr>
+          <p:cNvPr id="2" name="Título 1">
+            <a:extLst>
+              <a:ext uri="{FF2B5EF4-FFF2-40B4-BE49-F238E27FC236}">
+                <a16:creationId xmlns:a16="http://schemas.microsoft.com/office/drawing/2014/main" id="{32667A0F-B970-4129-9959-736CF09F1B21}"/>
+              </a:ext>
+            </a:extLst>
+          </p:cNvPr>
+          <p:cNvSpPr>
+            <a:spLocks noGrp="1"/>
+          </p:cNvSpPr>
+          <p:nvPr>
+            <p:ph type="title"/>
+          </p:nvPr>
+        </p:nvSpPr>
+        <p:spPr/>
+        <p:txBody>
+          <a:bodyPr/>
+          <a:lstStyle/>
+          <a:p>
+            <a:r>
+              <a:rPr lang="pt-BR" dirty="0"/>
+              <a:t>Compartilhamento de Informação</a:t>
+            </a:r>
+          </a:p>
+        </p:txBody>
+      </p:sp>
+      <p:sp>
+        <p:nvSpPr>
+          <p:cNvPr id="3" name="Espaço Reservado para Texto 2">
+            <a:extLst>
+              <a:ext uri="{FF2B5EF4-FFF2-40B4-BE49-F238E27FC236}">
+                <a16:creationId xmlns:a16="http://schemas.microsoft.com/office/drawing/2014/main" id="{FBD16FD3-9D53-45D5-B860-C07C8A35C030}"/>
+              </a:ext>
+            </a:extLst>
+          </p:cNvPr>
+          <p:cNvSpPr>
+            <a:spLocks noGrp="1"/>
+          </p:cNvSpPr>
+          <p:nvPr>
+            <p:ph type="body" idx="1"/>
+          </p:nvPr>
+        </p:nvSpPr>
+        <p:spPr>
+          <a:xfrm>
+            <a:off x="592347" y="1844675"/>
+            <a:ext cx="11007306" cy="1157143"/>
+          </a:xfrm>
+        </p:spPr>
+        <p:txBody>
+          <a:bodyPr/>
+          <a:lstStyle/>
+          <a:p>
+            <a:r>
+              <a:rPr lang="pt-BR" dirty="0"/>
+              <a:t>O compartilhamento de informação é um processo essencial na era digital, permitindo a troca de dados entre indivíduos, empresas e governos para facilitar a comunicação, a tomada de decisões e a inovação.</a:t>
+            </a:r>
+          </a:p>
+        </p:txBody>
+      </p:sp>
+      <p:pic>
+        <p:nvPicPr>
+          <p:cNvPr id="5" name="Imagem 4">
+            <a:extLst>
+              <a:ext uri="{FF2B5EF4-FFF2-40B4-BE49-F238E27FC236}">
+                <a16:creationId xmlns:a16="http://schemas.microsoft.com/office/drawing/2014/main" id="{B616F070-6F32-461A-A3AA-63546CB8DD06}"/>
+              </a:ext>
+            </a:extLst>
+          </p:cNvPr>
+          <p:cNvPicPr>
+            <a:picLocks noChangeAspect="1"/>
+          </p:cNvPicPr>
+          <p:nvPr/>
+        </p:nvPicPr>
+        <p:blipFill>
+          <a:blip r:embed="rId2"/>
+          <a:stretch>
+            <a:fillRect/>
+          </a:stretch>
+        </p:blipFill>
+        <p:spPr>
+          <a:xfrm>
+            <a:off x="3948545" y="3543500"/>
+            <a:ext cx="4294909" cy="2813260"/>
+          </a:xfrm>
+          <a:prstGeom prst="rect">
+            <a:avLst/>
+          </a:prstGeom>
+        </p:spPr>
+      </p:pic>
+    </p:spTree>
+    <p:extLst>
+      <p:ext uri="{BB962C8B-B14F-4D97-AF65-F5344CB8AC3E}">
+        <p14:creationId xmlns:p14="http://schemas.microsoft.com/office/powerpoint/2010/main" val="936782817"/>
+      </p:ext>
+    </p:extLst>
+  </p:cSld>
+  <p:clrMapOvr>
+    <a:masterClrMapping/>
+  </p:clrMapOvr>
+</p:sld>
+</file>
+
+<file path=ppt/slides/slide11.xml><?xml version="1.0" encoding="utf-8"?>
+<p:sld xmlns:a="http://schemas.openxmlformats.org/drawingml/2006/main" xmlns:r="http://schemas.openxmlformats.org/officeDocument/2006/relationships" xmlns:p="http://schemas.openxmlformats.org/presentationml/2006/main">
+  <p:cSld>
+    <p:spTree>
+      <p:nvGrpSpPr>
+        <p:cNvPr id="1" name=""/>
+        <p:cNvGrpSpPr/>
+        <p:nvPr/>
+      </p:nvGrpSpPr>
+      <p:grpSpPr>
+        <a:xfrm>
+          <a:off x="0" y="0"/>
+          <a:ext cx="0" cy="0"/>
+          <a:chOff x="0" y="0"/>
+          <a:chExt cx="0" cy="0"/>
+        </a:xfrm>
+      </p:grpSpPr>
+      <p:sp>
+        <p:nvSpPr>
+          <p:cNvPr id="2" name="Título 1">
+            <a:extLst>
+              <a:ext uri="{FF2B5EF4-FFF2-40B4-BE49-F238E27FC236}">
+                <a16:creationId xmlns:a16="http://schemas.microsoft.com/office/drawing/2014/main" id="{AEA50EF1-840D-46F3-8108-DC3F463FA65D}"/>
+              </a:ext>
+            </a:extLst>
+          </p:cNvPr>
+          <p:cNvSpPr>
+            <a:spLocks noGrp="1"/>
+          </p:cNvSpPr>
+          <p:nvPr>
+            <p:ph type="title"/>
+          </p:nvPr>
+        </p:nvSpPr>
+        <p:spPr/>
+        <p:txBody>
+          <a:bodyPr/>
+          <a:lstStyle/>
+          <a:p>
+            <a:r>
+              <a:rPr lang="pt-BR" dirty="0"/>
+              <a:t>Classificação da Informação: Proteção e Confidencialidade</a:t>
+            </a:r>
+          </a:p>
+        </p:txBody>
+      </p:sp>
+      <p:sp>
+        <p:nvSpPr>
+          <p:cNvPr id="3" name="Espaço Reservado para Texto 2">
+            <a:extLst>
+              <a:ext uri="{FF2B5EF4-FFF2-40B4-BE49-F238E27FC236}">
+                <a16:creationId xmlns:a16="http://schemas.microsoft.com/office/drawing/2014/main" id="{0F97950C-B256-459A-B0C6-5E30678277FD}"/>
+              </a:ext>
+            </a:extLst>
+          </p:cNvPr>
+          <p:cNvSpPr>
+            <a:spLocks noGrp="1"/>
+          </p:cNvSpPr>
+          <p:nvPr>
+            <p:ph type="body" idx="1"/>
+          </p:nvPr>
+        </p:nvSpPr>
+        <p:spPr/>
+        <p:txBody>
+          <a:bodyPr/>
+          <a:lstStyle/>
+          <a:p>
+            <a:r>
+              <a:rPr lang="pt-BR" dirty="0"/>
+              <a:t>A forma como tratamos, armazenamos e protegemos a informação é essencial para garantirmos sua integridade e evitar danos. A classificação da informação ajuda a manter sua segurança e sigilo conforme sua importância e impacto.</a:t>
+            </a:r>
+          </a:p>
+          <a:p>
+            <a:endParaRPr lang="pt-BR" dirty="0"/>
+          </a:p>
+          <a:p>
+            <a:r>
+              <a:rPr lang="pt-BR" dirty="0"/>
+              <a:t>Classificar a informação consiste em definir um grau de confidencialidade com base no impacto que seu acesso por pessoas não autorizadas pode causar.</a:t>
+            </a:r>
+          </a:p>
+        </p:txBody>
+      </p:sp>
+    </p:spTree>
+    <p:extLst>
+      <p:ext uri="{BB962C8B-B14F-4D97-AF65-F5344CB8AC3E}">
+        <p14:creationId xmlns:p14="http://schemas.microsoft.com/office/powerpoint/2010/main" val="1308221805"/>
+      </p:ext>
+    </p:extLst>
+  </p:cSld>
+  <p:clrMapOvr>
+    <a:masterClrMapping/>
+  </p:clrMapOvr>
+</p:sld>
+</file>
+
+<file path=ppt/slides/slide12.xml><?xml version="1.0" encoding="utf-8"?>
 <p:sld xmlns:a="http://schemas.openxmlformats.org/drawingml/2006/main" xmlns:r="http://schemas.openxmlformats.org/officeDocument/2006/relationships" xmlns:p="http://schemas.openxmlformats.org/presentationml/2006/main">
   <p:cSld>
     <p:spTree>
@@ -17488,8 +17809,12 @@
               <a:buChar char="•"/>
             </a:pPr>
             <a:r>
+              <a:rPr lang="pt-BR" sz="1400" b="1" dirty="0"/>
+              <a:t>Exemplos</a:t>
+            </a:r>
+            <a:r>
               <a:rPr lang="pt-BR" sz="1400" dirty="0"/>
-              <a:t>Exemplos: Previsão do tempo, comunicados oficiais, estatísticas populacionais, conteúdo de sites governamentais, horários de transporte público, perfis em redes sociais abertos, nome completo, publicações em blogs ou fóruns abertos.</a:t>
+              <a:t>: Previsão do tempo, comunicados oficiais, estatísticas populacionais, conteúdo de sites governamentais, horários de transporte público, perfis em redes sociais abertos, nome completo, publicações em blogs ou fóruns abertos.</a:t>
             </a:r>
           </a:p>
           <a:p>
@@ -17537,7 +17862,7 @@
 </p:sld>
 </file>
 
-<file path=ppt/slides/slide11.xml><?xml version="1.0" encoding="utf-8"?>
+<file path=ppt/slides/slide13.xml><?xml version="1.0" encoding="utf-8"?>
 <p:sld xmlns:a="http://schemas.openxmlformats.org/drawingml/2006/main" xmlns:r="http://schemas.openxmlformats.org/officeDocument/2006/relationships" xmlns:p="http://schemas.openxmlformats.org/presentationml/2006/main">
   <p:cSld>
     <p:spTree>
@@ -17668,7 +17993,7 @@
 </p:sld>
 </file>
 
-<file path=ppt/slides/slide12.xml><?xml version="1.0" encoding="utf-8"?>
+<file path=ppt/slides/slide14.xml><?xml version="1.0" encoding="utf-8"?>
 <p:sld xmlns:a="http://schemas.openxmlformats.org/drawingml/2006/main" xmlns:r="http://schemas.openxmlformats.org/officeDocument/2006/relationships" xmlns:p="http://schemas.openxmlformats.org/presentationml/2006/main">
   <p:cSld>
     <p:spTree>
@@ -17915,7 +18240,7 @@
 </p:sld>
 </file>
 
-<file path=ppt/slides/slide13.xml><?xml version="1.0" encoding="utf-8"?>
+<file path=ppt/slides/slide15.xml><?xml version="1.0" encoding="utf-8"?>
 <p:sld xmlns:a="http://schemas.openxmlformats.org/drawingml/2006/main" xmlns:r="http://schemas.openxmlformats.org/officeDocument/2006/relationships" xmlns:p="http://schemas.openxmlformats.org/presentationml/2006/main">
   <p:cSld>
     <p:spTree>
@@ -18037,7 +18362,7 @@
 </p:sld>
 </file>
 
-<file path=ppt/slides/slide14.xml><?xml version="1.0" encoding="utf-8"?>
+<file path=ppt/slides/slide16.xml><?xml version="1.0" encoding="utf-8"?>
 <p:sld xmlns:a="http://schemas.openxmlformats.org/drawingml/2006/main" xmlns:r="http://schemas.openxmlformats.org/officeDocument/2006/relationships" xmlns:p="http://schemas.openxmlformats.org/presentationml/2006/main">
   <p:cSld>
     <p:spTree>
@@ -18246,7 +18571,7 @@
 </p:sld>
 </file>
 
-<file path=ppt/slides/slide15.xml><?xml version="1.0" encoding="utf-8"?>
+<file path=ppt/slides/slide17.xml><?xml version="1.0" encoding="utf-8"?>
 <p:sld xmlns:a="http://schemas.openxmlformats.org/drawingml/2006/main" xmlns:r="http://schemas.openxmlformats.org/officeDocument/2006/relationships" xmlns:p="http://schemas.openxmlformats.org/presentationml/2006/main">
   <p:cSld>
     <p:spTree>
@@ -19838,7 +20163,7 @@
 </p:sld>
 </file>
 
-<file path=ppt/slides/slide16.xml><?xml version="1.0" encoding="utf-8"?>
+<file path=ppt/slides/slide18.xml><?xml version="1.0" encoding="utf-8"?>
 <p:sld xmlns:a="http://schemas.openxmlformats.org/drawingml/2006/main" xmlns:r="http://schemas.openxmlformats.org/officeDocument/2006/relationships" xmlns:p="http://schemas.openxmlformats.org/presentationml/2006/main">
   <p:cSld>
     <p:spTree>
@@ -20035,7 +20360,7 @@
 </p:sld>
 </file>
 
-<file path=ppt/slides/slide17.xml><?xml version="1.0" encoding="utf-8"?>
+<file path=ppt/slides/slide19.xml><?xml version="1.0" encoding="utf-8"?>
 <p:sld xmlns:a="http://schemas.openxmlformats.org/drawingml/2006/main" xmlns:r="http://schemas.openxmlformats.org/officeDocument/2006/relationships" xmlns:p="http://schemas.openxmlformats.org/presentationml/2006/main">
   <p:cSld>
     <p:spTree>
@@ -21296,7 +21621,90 @@
 </p:sld>
 </file>
 
-<file path=ppt/slides/slide18.xml><?xml version="1.0" encoding="utf-8"?>
+<file path=ppt/slides/slide2.xml><?xml version="1.0" encoding="utf-8"?>
+<p:sld xmlns:a="http://schemas.openxmlformats.org/drawingml/2006/main" xmlns:r="http://schemas.openxmlformats.org/officeDocument/2006/relationships" xmlns:p="http://schemas.openxmlformats.org/presentationml/2006/main">
+  <p:cSld>
+    <p:spTree>
+      <p:nvGrpSpPr>
+        <p:cNvPr id="1" name=""/>
+        <p:cNvGrpSpPr/>
+        <p:nvPr/>
+      </p:nvGrpSpPr>
+      <p:grpSpPr>
+        <a:xfrm>
+          <a:off x="0" y="0"/>
+          <a:ext cx="0" cy="0"/>
+          <a:chOff x="0" y="0"/>
+          <a:chExt cx="0" cy="0"/>
+        </a:xfrm>
+      </p:grpSpPr>
+      <p:sp>
+        <p:nvSpPr>
+          <p:cNvPr id="2" name="Título 1">
+            <a:extLst>
+              <a:ext uri="{FF2B5EF4-FFF2-40B4-BE49-F238E27FC236}">
+                <a16:creationId xmlns:a16="http://schemas.microsoft.com/office/drawing/2014/main" id="{3E6C6FF8-0CB5-3B18-A84E-E1D2B08F7509}"/>
+              </a:ext>
+            </a:extLst>
+          </p:cNvPr>
+          <p:cNvSpPr>
+            <a:spLocks noGrp="1"/>
+          </p:cNvSpPr>
+          <p:nvPr>
+            <p:ph type="title"/>
+          </p:nvPr>
+        </p:nvSpPr>
+        <p:spPr/>
+        <p:txBody>
+          <a:bodyPr/>
+          <a:lstStyle/>
+          <a:p>
+            <a:r>
+              <a:rPr lang="pt-BR" dirty="0"/>
+              <a:t>Apresentação sobre ISSO 27001 E ISSO 27002</a:t>
+            </a:r>
+          </a:p>
+        </p:txBody>
+      </p:sp>
+      <p:sp>
+        <p:nvSpPr>
+          <p:cNvPr id="3" name="Espaço Reservado para Texto 2">
+            <a:extLst>
+              <a:ext uri="{FF2B5EF4-FFF2-40B4-BE49-F238E27FC236}">
+                <a16:creationId xmlns:a16="http://schemas.microsoft.com/office/drawing/2014/main" id="{0AA17831-3A9C-4422-AED7-FE9E7EDF27F1}"/>
+              </a:ext>
+            </a:extLst>
+          </p:cNvPr>
+          <p:cNvSpPr>
+            <a:spLocks noGrp="1"/>
+          </p:cNvSpPr>
+          <p:nvPr>
+            <p:ph type="body" idx="1"/>
+          </p:nvPr>
+        </p:nvSpPr>
+        <p:spPr/>
+        <p:txBody>
+          <a:bodyPr/>
+          <a:lstStyle/>
+          <a:p>
+            <a:endParaRPr lang="pt-BR"/>
+          </a:p>
+        </p:txBody>
+      </p:sp>
+    </p:spTree>
+    <p:extLst>
+      <p:ext uri="{BB962C8B-B14F-4D97-AF65-F5344CB8AC3E}">
+        <p14:creationId xmlns:p14="http://schemas.microsoft.com/office/powerpoint/2010/main" val="612063467"/>
+      </p:ext>
+    </p:extLst>
+  </p:cSld>
+  <p:clrMapOvr>
+    <a:masterClrMapping/>
+  </p:clrMapOvr>
+</p:sld>
+</file>
+
+<file path=ppt/slides/slide20.xml><?xml version="1.0" encoding="utf-8"?>
 <p:sld xmlns:a="http://schemas.openxmlformats.org/drawingml/2006/main" xmlns:r="http://schemas.openxmlformats.org/officeDocument/2006/relationships" xmlns:p="http://schemas.openxmlformats.org/presentationml/2006/main">
   <p:cSld>
     <p:spTree>
@@ -21720,7 +22128,7 @@
 </p:sld>
 </file>
 
-<file path=ppt/slides/slide19.xml><?xml version="1.0" encoding="utf-8"?>
+<file path=ppt/slides/slide21.xml><?xml version="1.0" encoding="utf-8"?>
 <p:sld xmlns:a="http://schemas.openxmlformats.org/drawingml/2006/main" xmlns:r="http://schemas.openxmlformats.org/officeDocument/2006/relationships" xmlns:p="http://schemas.openxmlformats.org/presentationml/2006/main">
   <p:cSld>
     <p:spTree>
@@ -21857,158 +22265,7 @@
 </p:sld>
 </file>
 
-<file path=ppt/slides/slide2.xml><?xml version="1.0" encoding="utf-8"?>
-<p:sld xmlns:a="http://schemas.openxmlformats.org/drawingml/2006/main" xmlns:r="http://schemas.openxmlformats.org/officeDocument/2006/relationships" xmlns:p="http://schemas.openxmlformats.org/presentationml/2006/main">
-  <p:cSld>
-    <p:spTree>
-      <p:nvGrpSpPr>
-        <p:cNvPr id="1" name=""/>
-        <p:cNvGrpSpPr/>
-        <p:nvPr/>
-      </p:nvGrpSpPr>
-      <p:grpSpPr>
-        <a:xfrm>
-          <a:off x="0" y="0"/>
-          <a:ext cx="0" cy="0"/>
-          <a:chOff x="0" y="0"/>
-          <a:chExt cx="0" cy="0"/>
-        </a:xfrm>
-      </p:grpSpPr>
-      <p:sp>
-        <p:nvSpPr>
-          <p:cNvPr id="2" name="Título 1">
-            <a:extLst>
-              <a:ext uri="{FF2B5EF4-FFF2-40B4-BE49-F238E27FC236}">
-                <a16:creationId xmlns:a16="http://schemas.microsoft.com/office/drawing/2014/main" id="{64A47569-DDC4-4CD4-827E-26718CAACFDB}"/>
-              </a:ext>
-            </a:extLst>
-          </p:cNvPr>
-          <p:cNvSpPr>
-            <a:spLocks noGrp="1"/>
-          </p:cNvSpPr>
-          <p:nvPr>
-            <p:ph type="title"/>
-          </p:nvPr>
-        </p:nvSpPr>
-        <p:spPr/>
-        <p:txBody>
-          <a:bodyPr/>
-          <a:lstStyle/>
-          <a:p>
-            <a:r>
-              <a:rPr lang="pt-BR" dirty="0"/>
-              <a:t>Criação e Utilização de dados</a:t>
-            </a:r>
-          </a:p>
-        </p:txBody>
-      </p:sp>
-      <p:sp>
-        <p:nvSpPr>
-          <p:cNvPr id="3" name="Espaço Reservado para Texto 2">
-            <a:extLst>
-              <a:ext uri="{FF2B5EF4-FFF2-40B4-BE49-F238E27FC236}">
-                <a16:creationId xmlns:a16="http://schemas.microsoft.com/office/drawing/2014/main" id="{D9D0D700-2D2E-46E9-9973-617FA6A537FD}"/>
-              </a:ext>
-            </a:extLst>
-          </p:cNvPr>
-          <p:cNvSpPr>
-            <a:spLocks noGrp="1"/>
-          </p:cNvSpPr>
-          <p:nvPr>
-            <p:ph type="body" idx="1"/>
-          </p:nvPr>
-        </p:nvSpPr>
-        <p:spPr>
-          <a:xfrm>
-            <a:off x="592347" y="1844675"/>
-            <a:ext cx="11007306" cy="1584325"/>
-          </a:xfrm>
-        </p:spPr>
-        <p:txBody>
-          <a:bodyPr/>
-          <a:lstStyle/>
-          <a:p>
-            <a:r>
-              <a:rPr lang="pt-BR" dirty="0"/>
-              <a:t>Os dados sempre desempenharam um papel essencial na história da humanidade, desde os primeiros registros em tábuas de argila até a era da inteligência artificial. Eles permitem a organização do conhecimento, a tomada de decisões e o avanço da sociedade em diversas áreas.</a:t>
-            </a:r>
-          </a:p>
-        </p:txBody>
-      </p:sp>
-      <p:pic>
-        <p:nvPicPr>
-          <p:cNvPr id="4" name="Imagem 3">
-            <a:extLst>
-              <a:ext uri="{FF2B5EF4-FFF2-40B4-BE49-F238E27FC236}">
-                <a16:creationId xmlns:a16="http://schemas.microsoft.com/office/drawing/2014/main" id="{6125B829-220D-4229-95C6-67CC1387F5D9}"/>
-              </a:ext>
-            </a:extLst>
-          </p:cNvPr>
-          <p:cNvPicPr>
-            <a:picLocks noChangeAspect="1"/>
-          </p:cNvPicPr>
-          <p:nvPr/>
-        </p:nvPicPr>
-        <p:blipFill>
-          <a:blip r:embed="rId2"/>
-          <a:stretch>
-            <a:fillRect/>
-          </a:stretch>
-        </p:blipFill>
-        <p:spPr>
-          <a:xfrm>
-            <a:off x="1497936" y="3799789"/>
-            <a:ext cx="3935697" cy="2204489"/>
-          </a:xfrm>
-          <a:prstGeom prst="rect">
-            <a:avLst/>
-          </a:prstGeom>
-        </p:spPr>
-      </p:pic>
-      <p:pic>
-        <p:nvPicPr>
-          <p:cNvPr id="5" name="Imagem 4">
-            <a:extLst>
-              <a:ext uri="{FF2B5EF4-FFF2-40B4-BE49-F238E27FC236}">
-                <a16:creationId xmlns:a16="http://schemas.microsoft.com/office/drawing/2014/main" id="{56498F15-7678-4D4A-94CF-8AA35C3CDBEF}"/>
-              </a:ext>
-            </a:extLst>
-          </p:cNvPr>
-          <p:cNvPicPr>
-            <a:picLocks noChangeAspect="1"/>
-          </p:cNvPicPr>
-          <p:nvPr/>
-        </p:nvPicPr>
-        <p:blipFill>
-          <a:blip r:embed="rId3"/>
-          <a:stretch>
-            <a:fillRect/>
-          </a:stretch>
-        </p:blipFill>
-        <p:spPr>
-          <a:xfrm>
-            <a:off x="6931569" y="3431239"/>
-            <a:ext cx="3762496" cy="2941587"/>
-          </a:xfrm>
-          <a:prstGeom prst="rect">
-            <a:avLst/>
-          </a:prstGeom>
-        </p:spPr>
-      </p:pic>
-    </p:spTree>
-    <p:extLst>
-      <p:ext uri="{BB962C8B-B14F-4D97-AF65-F5344CB8AC3E}">
-        <p14:creationId xmlns:p14="http://schemas.microsoft.com/office/powerpoint/2010/main" val="4195122277"/>
-      </p:ext>
-    </p:extLst>
-  </p:cSld>
-  <p:clrMapOvr>
-    <a:masterClrMapping/>
-  </p:clrMapOvr>
-</p:sld>
-</file>
-
-<file path=ppt/slides/slide20.xml><?xml version="1.0" encoding="utf-8"?>
+<file path=ppt/slides/slide22.xml><?xml version="1.0" encoding="utf-8"?>
 <p:sld xmlns:a="http://schemas.openxmlformats.org/drawingml/2006/main" xmlns:r="http://schemas.openxmlformats.org/officeDocument/2006/relationships" xmlns:p="http://schemas.openxmlformats.org/presentationml/2006/main">
   <p:cSld>
     <p:spTree>
@@ -22964,7 +23221,7 @@
 </p:sld>
 </file>
 
-<file path=ppt/slides/slide21.xml><?xml version="1.0" encoding="utf-8"?>
+<file path=ppt/slides/slide23.xml><?xml version="1.0" encoding="utf-8"?>
 <p:sld xmlns:a="http://schemas.openxmlformats.org/drawingml/2006/main" xmlns:r="http://schemas.openxmlformats.org/officeDocument/2006/relationships" xmlns:p="http://schemas.openxmlformats.org/presentationml/2006/main">
   <p:cSld>
     <p:spTree>
@@ -24249,7 +24506,7 @@
 </p:sld>
 </file>
 
-<file path=ppt/slides/slide22.xml><?xml version="1.0" encoding="utf-8"?>
+<file path=ppt/slides/slide24.xml><?xml version="1.0" encoding="utf-8"?>
 <p:sld xmlns:a="http://schemas.openxmlformats.org/drawingml/2006/main" xmlns:r="http://schemas.openxmlformats.org/officeDocument/2006/relationships" xmlns:p="http://schemas.openxmlformats.org/presentationml/2006/main">
   <p:cSld>
     <p:spTree>
@@ -24367,10 +24624,26 @@
               <a:buNone/>
             </a:pPr>
             <a:r>
-              <a:rPr lang="pt-BR" b="1"/>
-              <a:t>1. Ataque de DDoS ao Serviço de DNS Dyn (2016)</a:t>
+              <a:rPr lang="pt-BR" b="1" dirty="0"/>
+              <a:t>1. Ataque de </a:t>
             </a:r>
-            <a:endParaRPr/>
+            <a:r>
+              <a:rPr lang="pt-BR" b="1" dirty="0" err="1"/>
+              <a:t>DDoS</a:t>
+            </a:r>
+            <a:r>
+              <a:rPr lang="pt-BR" b="1" dirty="0"/>
+              <a:t> ao Serviço de DNS </a:t>
+            </a:r>
+            <a:r>
+              <a:rPr lang="pt-BR" b="1" dirty="0" err="1"/>
+              <a:t>Dyn</a:t>
+            </a:r>
+            <a:r>
+              <a:rPr lang="pt-BR" b="1" dirty="0"/>
+              <a:t> (2016)</a:t>
+            </a:r>
+            <a:endParaRPr dirty="0"/>
           </a:p>
           <a:p>
             <a:pPr marL="0" marR="0" lvl="0" indent="0" algn="just" rtl="0">
@@ -24391,18 +24664,50 @@
               <a:buNone/>
             </a:pPr>
             <a:r>
-              <a:rPr lang="pt-BR"/>
-              <a:t>Em 2016, o serviço de DNS Dyn foi alvo de um ataque de negação de serviço distribuído (DDoS), onde milhões de dispositivos infectados com malware (bots) foram usados para enviar uma quantidade massiva de tráfego para os servidores da empresa. Esse ataque afetou vários sites populares, como Twitter, Reddit, Spotify e Netflix. O serviço de DNS ficou sobrecarregado, tornando os sites </a:t>
+              <a:rPr lang="pt-BR" dirty="0"/>
+              <a:t>Em 2016, o serviço de DNS </a:t>
             </a:r>
             <a:r>
-              <a:rPr lang="pt-BR" b="1"/>
+              <a:rPr lang="pt-BR" dirty="0" err="1"/>
+              <a:t>Dyn</a:t>
+            </a:r>
+            <a:r>
+              <a:rPr lang="pt-BR" dirty="0"/>
+              <a:t> foi alvo de um ataque de negação de serviço distribuído (</a:t>
+            </a:r>
+            <a:r>
+              <a:rPr lang="pt-BR" dirty="0" err="1"/>
+              <a:t>DDoS</a:t>
+            </a:r>
+            <a:r>
+              <a:rPr lang="pt-BR" dirty="0"/>
+              <a:t>), onde milhões de dispositivos infectados com malware (</a:t>
+            </a:r>
+            <a:r>
+              <a:rPr lang="pt-BR" dirty="0" err="1"/>
+              <a:t>bots</a:t>
+            </a:r>
+            <a:r>
+              <a:rPr lang="pt-BR" dirty="0"/>
+              <a:t>) foram usados para enviar uma quantidade massiva de tráfego para os servidores da empresa. Esse ataque afetou vários sites populares, como Twitter, </a:t>
+            </a:r>
+            <a:r>
+              <a:rPr lang="pt-BR" dirty="0" err="1"/>
+              <a:t>Reddit</a:t>
+            </a:r>
+            <a:r>
+              <a:rPr lang="pt-BR" dirty="0"/>
+              <a:t>, Spotify e Netflix. O serviço de DNS ficou sobrecarregado, tornando os sites </a:t>
+            </a:r>
+            <a:r>
+              <a:rPr lang="pt-BR" b="1" dirty="0"/>
               <a:t>inacessíveis</a:t>
             </a:r>
             <a:r>
-              <a:rPr lang="pt-BR"/>
+              <a:rPr lang="pt-BR" dirty="0"/>
               <a:t> para usuários em várias regiões do mundo.</a:t>
             </a:r>
-            <a:endParaRPr/>
+            <a:endParaRPr dirty="0"/>
           </a:p>
           <a:p>
             <a:pPr marL="0" marR="0" lvl="0" indent="0" algn="just" rtl="0">
@@ -24422,7 +24727,7 @@
               <a:buFont typeface="Arial"/>
               <a:buNone/>
             </a:pPr>
-            <a:endParaRPr/>
+            <a:endParaRPr dirty="0"/>
           </a:p>
           <a:p>
             <a:pPr marL="0" marR="0" lvl="0" indent="0" algn="just" rtl="0">
@@ -24442,7 +24747,7 @@
               <a:buFont typeface="Arial"/>
               <a:buNone/>
             </a:pPr>
-            <a:endParaRPr/>
+            <a:endParaRPr dirty="0"/>
           </a:p>
           <a:p>
             <a:pPr marL="0" marR="0" lvl="0" indent="0" algn="just" rtl="0">
@@ -24462,7 +24767,7 @@
               <a:buFont typeface="Arial"/>
               <a:buNone/>
             </a:pPr>
-            <a:endParaRPr/>
+            <a:endParaRPr dirty="0"/>
           </a:p>
         </p:txBody>
       </p:sp>
@@ -24474,7 +24779,7 @@
 </p:sld>
 </file>
 
-<file path=ppt/slides/slide23.xml><?xml version="1.0" encoding="utf-8"?>
+<file path=ppt/slides/slide25.xml><?xml version="1.0" encoding="utf-8"?>
 <p:sld xmlns:a="http://schemas.openxmlformats.org/drawingml/2006/main" xmlns:r="http://schemas.openxmlformats.org/officeDocument/2006/relationships" xmlns:p="http://schemas.openxmlformats.org/presentationml/2006/main">
   <p:cSld>
     <p:spTree>
@@ -24592,10 +24897,10 @@
               <a:buNone/>
             </a:pPr>
             <a:r>
-              <a:rPr lang="pt-BR" b="1"/>
+              <a:rPr lang="pt-BR" b="1" dirty="0"/>
               <a:t>2. Alteração de Transações Bancárias em 2014</a:t>
             </a:r>
-            <a:endParaRPr/>
+            <a:endParaRPr dirty="0"/>
           </a:p>
           <a:p>
             <a:pPr marL="0" marR="0" lvl="0" indent="0" algn="just" rtl="0">
@@ -24616,26 +24921,26 @@
               <a:buNone/>
             </a:pPr>
             <a:r>
-              <a:rPr lang="pt-BR"/>
+              <a:rPr lang="pt-BR" dirty="0"/>
               <a:t>Em 2014, uma instituição financeira global foi alvo de um ataque cibernético. Durante o ataque, os hackers conseguiram acessar o sistema e </a:t>
             </a:r>
             <a:r>
-              <a:rPr lang="pt-BR" b="1"/>
+              <a:rPr lang="pt-BR" b="1" dirty="0"/>
               <a:t>alterar transações bancárias</a:t>
             </a:r>
             <a:r>
-              <a:rPr lang="pt-BR"/>
+              <a:rPr lang="pt-BR" dirty="0"/>
               <a:t>. Eles modificaram as informações de transações, fazendo com que os valores corretos fossem alterados ou os depósitos fossem feitos de forma errada, prejudicando os clientes do banco. Quando a fraude foi detectada, os clientes estavam em uma situação de </a:t>
             </a:r>
             <a:r>
-              <a:rPr lang="pt-BR" b="1"/>
+              <a:rPr lang="pt-BR" b="1" dirty="0"/>
               <a:t>desconfiança</a:t>
             </a:r>
             <a:r>
-              <a:rPr lang="pt-BR"/>
+              <a:rPr lang="pt-BR" dirty="0"/>
               <a:t>, pois suas transações haviam sido alteradas sem o seu conhecimento.</a:t>
             </a:r>
-            <a:endParaRPr/>
+            <a:endParaRPr dirty="0"/>
           </a:p>
           <a:p>
             <a:pPr marL="0" marR="0" lvl="0" indent="0" algn="just" rtl="0">
@@ -24655,7 +24960,7 @@
               <a:buFont typeface="Arial"/>
               <a:buNone/>
             </a:pPr>
-            <a:endParaRPr/>
+            <a:endParaRPr dirty="0"/>
           </a:p>
           <a:p>
             <a:pPr marL="0" marR="0" lvl="0" indent="0" algn="just" rtl="0">
@@ -24675,7 +24980,7 @@
               <a:buFont typeface="Arial"/>
               <a:buNone/>
             </a:pPr>
-            <a:endParaRPr/>
+            <a:endParaRPr dirty="0"/>
           </a:p>
         </p:txBody>
       </p:sp>
@@ -24687,7 +24992,7 @@
 </p:sld>
 </file>
 
-<file path=ppt/slides/slide24.xml><?xml version="1.0" encoding="utf-8"?>
+<file path=ppt/slides/slide26.xml><?xml version="1.0" encoding="utf-8"?>
 <p:sld xmlns:a="http://schemas.openxmlformats.org/drawingml/2006/main" xmlns:r="http://schemas.openxmlformats.org/officeDocument/2006/relationships" xmlns:p="http://schemas.openxmlformats.org/presentationml/2006/main">
   <p:cSld>
     <p:spTree>
@@ -24864,7 +25169,7 @@
 </p:sld>
 </file>
 
-<file path=ppt/slides/slide25.xml><?xml version="1.0" encoding="utf-8"?>
+<file path=ppt/slides/slide27.xml><?xml version="1.0" encoding="utf-8"?>
 <p:sld xmlns:a="http://schemas.openxmlformats.org/drawingml/2006/main" xmlns:r="http://schemas.openxmlformats.org/officeDocument/2006/relationships" xmlns:p="http://schemas.openxmlformats.org/presentationml/2006/main">
   <p:cSld>
     <p:spTree>
@@ -25053,7 +25358,7 @@
 </p:sld>
 </file>
 
-<file path=ppt/slides/slide26.xml><?xml version="1.0" encoding="utf-8"?>
+<file path=ppt/slides/slide28.xml><?xml version="1.0" encoding="utf-8"?>
 <p:sld xmlns:a="http://schemas.openxmlformats.org/drawingml/2006/main" xmlns:r="http://schemas.openxmlformats.org/officeDocument/2006/relationships" xmlns:p="http://schemas.openxmlformats.org/presentationml/2006/main">
   <p:cSld>
     <p:spTree>
@@ -25784,7 +26089,7 @@
 </p:sld>
 </file>
 
-<file path=ppt/slides/slide27.xml><?xml version="1.0" encoding="utf-8"?>
+<file path=ppt/slides/slide29.xml><?xml version="1.0" encoding="utf-8"?>
 <p:sld xmlns:a="http://schemas.openxmlformats.org/drawingml/2006/main" xmlns:r="http://schemas.openxmlformats.org/officeDocument/2006/relationships" xmlns:p="http://schemas.openxmlformats.org/presentationml/2006/main">
   <p:cSld>
     <p:spTree>
@@ -25921,7 +26226,136 @@
 </p:sld>
 </file>
 
-<file path=ppt/slides/slide28.xml><?xml version="1.0" encoding="utf-8"?>
+<file path=ppt/slides/slide3.xml><?xml version="1.0" encoding="utf-8"?>
+<p:sld xmlns:a="http://schemas.openxmlformats.org/drawingml/2006/main" xmlns:r="http://schemas.openxmlformats.org/officeDocument/2006/relationships" xmlns:p="http://schemas.openxmlformats.org/presentationml/2006/main">
+  <p:cSld>
+    <p:spTree>
+      <p:nvGrpSpPr>
+        <p:cNvPr id="1" name=""/>
+        <p:cNvGrpSpPr/>
+        <p:nvPr/>
+      </p:nvGrpSpPr>
+      <p:grpSpPr>
+        <a:xfrm>
+          <a:off x="0" y="0"/>
+          <a:ext cx="0" cy="0"/>
+          <a:chOff x="0" y="0"/>
+          <a:chExt cx="0" cy="0"/>
+        </a:xfrm>
+      </p:grpSpPr>
+      <p:sp>
+        <p:nvSpPr>
+          <p:cNvPr id="2" name="Título 1">
+            <a:extLst>
+              <a:ext uri="{FF2B5EF4-FFF2-40B4-BE49-F238E27FC236}">
+                <a16:creationId xmlns:a16="http://schemas.microsoft.com/office/drawing/2014/main" id="{0767154C-483D-648C-EF74-B2A54B6DC496}"/>
+              </a:ext>
+            </a:extLst>
+          </p:cNvPr>
+          <p:cNvSpPr>
+            <a:spLocks noGrp="1"/>
+          </p:cNvSpPr>
+          <p:nvPr>
+            <p:ph type="title"/>
+          </p:nvPr>
+        </p:nvSpPr>
+        <p:spPr/>
+        <p:txBody>
+          <a:bodyPr/>
+          <a:lstStyle/>
+          <a:p>
+            <a:r>
+              <a:rPr lang="pt-BR" dirty="0"/>
+              <a:t>Objetivos da Aula</a:t>
+            </a:r>
+          </a:p>
+        </p:txBody>
+      </p:sp>
+      <p:sp>
+        <p:nvSpPr>
+          <p:cNvPr id="3" name="Espaço Reservado para Texto 2">
+            <a:extLst>
+              <a:ext uri="{FF2B5EF4-FFF2-40B4-BE49-F238E27FC236}">
+                <a16:creationId xmlns:a16="http://schemas.microsoft.com/office/drawing/2014/main" id="{4D3BF340-AE18-6A13-5320-BA3201628525}"/>
+              </a:ext>
+            </a:extLst>
+          </p:cNvPr>
+          <p:cNvSpPr>
+            <a:spLocks noGrp="1"/>
+          </p:cNvSpPr>
+          <p:nvPr>
+            <p:ph type="body" idx="1"/>
+          </p:nvPr>
+        </p:nvSpPr>
+        <p:spPr/>
+        <p:txBody>
+          <a:bodyPr/>
+          <a:lstStyle/>
+          <a:p>
+            <a:r>
+              <a:rPr lang="pt-BR" dirty="0"/>
+              <a:t>Ao final da aula, o aluno será capaz de:</a:t>
+            </a:r>
+          </a:p>
+          <a:p>
+            <a:pPr marL="1257300" lvl="1" indent="-342900">
+              <a:buFont typeface="Arial" panose="020B0604020202020204" pitchFamily="34" charset="0"/>
+              <a:buChar char="•"/>
+            </a:pPr>
+            <a:r>
+              <a:rPr lang="pt-BR" sz="1800" dirty="0"/>
+              <a:t>Compreender o conceito de Segurança da Informação</a:t>
+            </a:r>
+          </a:p>
+          <a:p>
+            <a:pPr marL="1257300" lvl="1" indent="-342900">
+              <a:buFont typeface="Arial" panose="020B0604020202020204" pitchFamily="34" charset="0"/>
+              <a:buChar char="•"/>
+            </a:pPr>
+            <a:r>
+              <a:rPr lang="pt-BR" sz="1800" dirty="0"/>
+              <a:t>Diferenciar dado, informação e ativo</a:t>
+            </a:r>
+          </a:p>
+          <a:p>
+            <a:pPr marL="1257300" lvl="1" indent="-342900">
+              <a:buFont typeface="Arial" panose="020B0604020202020204" pitchFamily="34" charset="0"/>
+              <a:buChar char="•"/>
+            </a:pPr>
+            <a:r>
+              <a:rPr lang="pt-BR" sz="1800" dirty="0"/>
+              <a:t>Entender a importância estratégica da segurança</a:t>
+            </a:r>
+          </a:p>
+          <a:p>
+            <a:pPr marL="1257300" lvl="1" indent="-342900">
+              <a:buFont typeface="Arial" panose="020B0604020202020204" pitchFamily="34" charset="0"/>
+              <a:buChar char="•"/>
+            </a:pPr>
+            <a:r>
+              <a:rPr lang="pt-BR" sz="1800" dirty="0"/>
+              <a:t>Identificar os pilares da Tríade CIA</a:t>
+            </a:r>
+          </a:p>
+          <a:p>
+            <a:endParaRPr lang="pt-BR" dirty="0"/>
+          </a:p>
+        </p:txBody>
+      </p:sp>
+    </p:spTree>
+    <p:extLst>
+      <p:ext uri="{BB962C8B-B14F-4D97-AF65-F5344CB8AC3E}">
+        <p14:creationId xmlns:p14="http://schemas.microsoft.com/office/powerpoint/2010/main" val="300458916"/>
+      </p:ext>
+    </p:extLst>
+  </p:cSld>
+  <p:clrMapOvr>
+    <a:masterClrMapping/>
+  </p:clrMapOvr>
+</p:sld>
+</file>
+
+<file path=ppt/slides/slide30.xml><?xml version="1.0" encoding="utf-8"?>
 <p:sld xmlns:a="http://schemas.openxmlformats.org/drawingml/2006/main" xmlns:r="http://schemas.openxmlformats.org/officeDocument/2006/relationships" xmlns:p="http://schemas.openxmlformats.org/presentationml/2006/main">
   <p:cSld>
     <p:spTree>
@@ -26248,7 +26682,7 @@
 </p:sld>
 </file>
 
-<file path=ppt/slides/slide29.xml><?xml version="1.0" encoding="utf-8"?>
+<file path=ppt/slides/slide31.xml><?xml version="1.0" encoding="utf-8"?>
 <p:sld xmlns:a="http://schemas.openxmlformats.org/drawingml/2006/main" xmlns:r="http://schemas.openxmlformats.org/officeDocument/2006/relationships" xmlns:p="http://schemas.openxmlformats.org/presentationml/2006/main">
   <p:cSld>
     <p:spTree>
@@ -26306,7 +26740,158 @@
 </p:sld>
 </file>
 
-<file path=ppt/slides/slide3.xml><?xml version="1.0" encoding="utf-8"?>
+<file path=ppt/slides/slide4.xml><?xml version="1.0" encoding="utf-8"?>
+<p:sld xmlns:a="http://schemas.openxmlformats.org/drawingml/2006/main" xmlns:r="http://schemas.openxmlformats.org/officeDocument/2006/relationships" xmlns:p="http://schemas.openxmlformats.org/presentationml/2006/main">
+  <p:cSld>
+    <p:spTree>
+      <p:nvGrpSpPr>
+        <p:cNvPr id="1" name=""/>
+        <p:cNvGrpSpPr/>
+        <p:nvPr/>
+      </p:nvGrpSpPr>
+      <p:grpSpPr>
+        <a:xfrm>
+          <a:off x="0" y="0"/>
+          <a:ext cx="0" cy="0"/>
+          <a:chOff x="0" y="0"/>
+          <a:chExt cx="0" cy="0"/>
+        </a:xfrm>
+      </p:grpSpPr>
+      <p:sp>
+        <p:nvSpPr>
+          <p:cNvPr id="2" name="Título 1">
+            <a:extLst>
+              <a:ext uri="{FF2B5EF4-FFF2-40B4-BE49-F238E27FC236}">
+                <a16:creationId xmlns:a16="http://schemas.microsoft.com/office/drawing/2014/main" id="{64A47569-DDC4-4CD4-827E-26718CAACFDB}"/>
+              </a:ext>
+            </a:extLst>
+          </p:cNvPr>
+          <p:cNvSpPr>
+            <a:spLocks noGrp="1"/>
+          </p:cNvSpPr>
+          <p:nvPr>
+            <p:ph type="title"/>
+          </p:nvPr>
+        </p:nvSpPr>
+        <p:spPr/>
+        <p:txBody>
+          <a:bodyPr/>
+          <a:lstStyle/>
+          <a:p>
+            <a:r>
+              <a:rPr lang="pt-BR" dirty="0"/>
+              <a:t>Criação e Utilização de dados</a:t>
+            </a:r>
+          </a:p>
+        </p:txBody>
+      </p:sp>
+      <p:sp>
+        <p:nvSpPr>
+          <p:cNvPr id="3" name="Espaço Reservado para Texto 2">
+            <a:extLst>
+              <a:ext uri="{FF2B5EF4-FFF2-40B4-BE49-F238E27FC236}">
+                <a16:creationId xmlns:a16="http://schemas.microsoft.com/office/drawing/2014/main" id="{D9D0D700-2D2E-46E9-9973-617FA6A537FD}"/>
+              </a:ext>
+            </a:extLst>
+          </p:cNvPr>
+          <p:cNvSpPr>
+            <a:spLocks noGrp="1"/>
+          </p:cNvSpPr>
+          <p:nvPr>
+            <p:ph type="body" idx="1"/>
+          </p:nvPr>
+        </p:nvSpPr>
+        <p:spPr>
+          <a:xfrm>
+            <a:off x="592347" y="1844675"/>
+            <a:ext cx="11007306" cy="1584325"/>
+          </a:xfrm>
+        </p:spPr>
+        <p:txBody>
+          <a:bodyPr/>
+          <a:lstStyle/>
+          <a:p>
+            <a:r>
+              <a:rPr lang="pt-BR" dirty="0"/>
+              <a:t>Os dados sempre desempenharam um papel essencial na história da humanidade, desde os primeiros registros em tábuas de argila até a era da inteligência artificial. Eles permitem a organização do conhecimento, a tomada de decisões e o avanço da sociedade em diversas áreas.</a:t>
+            </a:r>
+          </a:p>
+        </p:txBody>
+      </p:sp>
+      <p:pic>
+        <p:nvPicPr>
+          <p:cNvPr id="4" name="Imagem 3">
+            <a:extLst>
+              <a:ext uri="{FF2B5EF4-FFF2-40B4-BE49-F238E27FC236}">
+                <a16:creationId xmlns:a16="http://schemas.microsoft.com/office/drawing/2014/main" id="{6125B829-220D-4229-95C6-67CC1387F5D9}"/>
+              </a:ext>
+            </a:extLst>
+          </p:cNvPr>
+          <p:cNvPicPr>
+            <a:picLocks noChangeAspect="1"/>
+          </p:cNvPicPr>
+          <p:nvPr/>
+        </p:nvPicPr>
+        <p:blipFill>
+          <a:blip r:embed="rId2"/>
+          <a:stretch>
+            <a:fillRect/>
+          </a:stretch>
+        </p:blipFill>
+        <p:spPr>
+          <a:xfrm>
+            <a:off x="1497936" y="3799789"/>
+            <a:ext cx="3935697" cy="2204489"/>
+          </a:xfrm>
+          <a:prstGeom prst="rect">
+            <a:avLst/>
+          </a:prstGeom>
+        </p:spPr>
+      </p:pic>
+      <p:pic>
+        <p:nvPicPr>
+          <p:cNvPr id="5" name="Imagem 4">
+            <a:extLst>
+              <a:ext uri="{FF2B5EF4-FFF2-40B4-BE49-F238E27FC236}">
+                <a16:creationId xmlns:a16="http://schemas.microsoft.com/office/drawing/2014/main" id="{56498F15-7678-4D4A-94CF-8AA35C3CDBEF}"/>
+              </a:ext>
+            </a:extLst>
+          </p:cNvPr>
+          <p:cNvPicPr>
+            <a:picLocks noChangeAspect="1"/>
+          </p:cNvPicPr>
+          <p:nvPr/>
+        </p:nvPicPr>
+        <p:blipFill>
+          <a:blip r:embed="rId3"/>
+          <a:stretch>
+            <a:fillRect/>
+          </a:stretch>
+        </p:blipFill>
+        <p:spPr>
+          <a:xfrm>
+            <a:off x="6931569" y="3431239"/>
+            <a:ext cx="3762496" cy="2941587"/>
+          </a:xfrm>
+          <a:prstGeom prst="rect">
+            <a:avLst/>
+          </a:prstGeom>
+        </p:spPr>
+      </p:pic>
+    </p:spTree>
+    <p:extLst>
+      <p:ext uri="{BB962C8B-B14F-4D97-AF65-F5344CB8AC3E}">
+        <p14:creationId xmlns:p14="http://schemas.microsoft.com/office/powerpoint/2010/main" val="4195122277"/>
+      </p:ext>
+    </p:extLst>
+  </p:cSld>
+  <p:clrMapOvr>
+    <a:masterClrMapping/>
+  </p:clrMapOvr>
+</p:sld>
+</file>
+
+<file path=ppt/slides/slide5.xml><?xml version="1.0" encoding="utf-8"?>
 <p:sld xmlns:a="http://schemas.openxmlformats.org/drawingml/2006/main" xmlns:r="http://schemas.openxmlformats.org/officeDocument/2006/relationships" xmlns:p="http://schemas.openxmlformats.org/presentationml/2006/main">
   <p:cSld>
     <p:spTree>
@@ -26781,7 +27366,7 @@
             <p:nvPr/>
           </p:nvPicPr>
           <p:blipFill>
-            <a:blip r:embed="rId2"/>
+            <a:blip r:embed="rId3"/>
             <a:stretch>
               <a:fillRect/>
             </a:stretch>
@@ -26811,7 +27396,7 @@
             <p:nvPr/>
           </p:nvPicPr>
           <p:blipFill>
-            <a:blip r:embed="rId3"/>
+            <a:blip r:embed="rId4"/>
             <a:stretch>
               <a:fillRect/>
             </a:stretch>
@@ -26841,7 +27426,7 @@
             <p:nvPr/>
           </p:nvPicPr>
           <p:blipFill>
-            <a:blip r:embed="rId4"/>
+            <a:blip r:embed="rId5"/>
             <a:stretch>
               <a:fillRect/>
             </a:stretch>
@@ -26871,7 +27456,7 @@
             <p:nvPr/>
           </p:nvPicPr>
           <p:blipFill>
-            <a:blip r:embed="rId5"/>
+            <a:blip r:embed="rId6"/>
             <a:stretch>
               <a:fillRect/>
             </a:stretch>
@@ -27049,7 +27634,7 @@
           <p:nvPr/>
         </p:nvPicPr>
         <p:blipFill>
-          <a:blip r:embed="rId6"/>
+          <a:blip r:embed="rId7"/>
           <a:stretch>
             <a:fillRect/>
           </a:stretch>
@@ -27079,7 +27664,7 @@
           <p:nvPr/>
         </p:nvPicPr>
         <p:blipFill>
-          <a:blip r:embed="rId7"/>
+          <a:blip r:embed="rId8"/>
           <a:stretch>
             <a:fillRect/>
           </a:stretch>
@@ -27109,7 +27694,7 @@
           <p:nvPr/>
         </p:nvPicPr>
         <p:blipFill>
-          <a:blip r:embed="rId8"/>
+          <a:blip r:embed="rId9"/>
           <a:stretch>
             <a:fillRect/>
           </a:stretch>
@@ -27351,7 +27936,7 @@
 </p:sld>
 </file>
 
-<file path=ppt/slides/slide4.xml><?xml version="1.0" encoding="utf-8"?>
+<file path=ppt/slides/slide6.xml><?xml version="1.0" encoding="utf-8"?>
 <p:sld xmlns:a="http://schemas.openxmlformats.org/drawingml/2006/main" xmlns:r="http://schemas.openxmlformats.org/officeDocument/2006/relationships" xmlns:p="http://schemas.openxmlformats.org/presentationml/2006/main">
   <p:cSld>
     <p:spTree>
@@ -27539,7 +28124,7 @@
 </p:sld>
 </file>
 
-<file path=ppt/slides/slide5.xml><?xml version="1.0" encoding="utf-8"?>
+<file path=ppt/slides/slide7.xml><?xml version="1.0" encoding="utf-8"?>
 <p:sld xmlns:a="http://schemas.openxmlformats.org/drawingml/2006/main" xmlns:r="http://schemas.openxmlformats.org/officeDocument/2006/relationships" xmlns:p="http://schemas.openxmlformats.org/presentationml/2006/main">
   <p:cSld>
     <p:spTree>
@@ -27614,8 +28199,8 @@
         </p:blipFill>
         <p:spPr>
           <a:xfrm>
-            <a:off x="1089914" y="2295405"/>
-            <a:ext cx="10012172" cy="3781953"/>
+            <a:off x="749185" y="2295405"/>
+            <a:ext cx="10162286" cy="3781953"/>
           </a:xfrm>
           <a:prstGeom prst="rect">
             <a:avLst/>
@@ -27635,7 +28220,7 @@
 </p:sld>
 </file>
 
-<file path=ppt/slides/slide6.xml><?xml version="1.0" encoding="utf-8"?>
+<file path=ppt/slides/slide8.xml><?xml version="1.0" encoding="utf-8"?>
 <p:sld xmlns:a="http://schemas.openxmlformats.org/drawingml/2006/main" xmlns:r="http://schemas.openxmlformats.org/officeDocument/2006/relationships" xmlns:p="http://schemas.openxmlformats.org/presentationml/2006/main">
   <p:cSld>
     <p:spTree>
@@ -27731,7 +28316,7 @@
 </p:sld>
 </file>
 
-<file path=ppt/slides/slide7.xml><?xml version="1.0" encoding="utf-8"?>
+<file path=ppt/slides/slide9.xml><?xml version="1.0" encoding="utf-8"?>
 <p:sld xmlns:a="http://schemas.openxmlformats.org/drawingml/2006/main" xmlns:r="http://schemas.openxmlformats.org/officeDocument/2006/relationships" xmlns:p="http://schemas.openxmlformats.org/presentationml/2006/main">
   <p:cSld>
     <p:spTree>
@@ -27964,222 +28549,6 @@
     <p:extLst>
       <p:ext uri="{BB962C8B-B14F-4D97-AF65-F5344CB8AC3E}">
         <p14:creationId xmlns:p14="http://schemas.microsoft.com/office/powerpoint/2010/main" val="2209690060"/>
-      </p:ext>
-    </p:extLst>
-  </p:cSld>
-  <p:clrMapOvr>
-    <a:masterClrMapping/>
-  </p:clrMapOvr>
-</p:sld>
-</file>
-
-<file path=ppt/slides/slide8.xml><?xml version="1.0" encoding="utf-8"?>
-<p:sld xmlns:a="http://schemas.openxmlformats.org/drawingml/2006/main" xmlns:r="http://schemas.openxmlformats.org/officeDocument/2006/relationships" xmlns:p="http://schemas.openxmlformats.org/presentationml/2006/main">
-  <p:cSld>
-    <p:spTree>
-      <p:nvGrpSpPr>
-        <p:cNvPr id="1" name=""/>
-        <p:cNvGrpSpPr/>
-        <p:nvPr/>
-      </p:nvGrpSpPr>
-      <p:grpSpPr>
-        <a:xfrm>
-          <a:off x="0" y="0"/>
-          <a:ext cx="0" cy="0"/>
-          <a:chOff x="0" y="0"/>
-          <a:chExt cx="0" cy="0"/>
-        </a:xfrm>
-      </p:grpSpPr>
-      <p:sp>
-        <p:nvSpPr>
-          <p:cNvPr id="2" name="Título 1">
-            <a:extLst>
-              <a:ext uri="{FF2B5EF4-FFF2-40B4-BE49-F238E27FC236}">
-                <a16:creationId xmlns:a16="http://schemas.microsoft.com/office/drawing/2014/main" id="{32667A0F-B970-4129-9959-736CF09F1B21}"/>
-              </a:ext>
-            </a:extLst>
-          </p:cNvPr>
-          <p:cNvSpPr>
-            <a:spLocks noGrp="1"/>
-          </p:cNvSpPr>
-          <p:nvPr>
-            <p:ph type="title"/>
-          </p:nvPr>
-        </p:nvSpPr>
-        <p:spPr/>
-        <p:txBody>
-          <a:bodyPr/>
-          <a:lstStyle/>
-          <a:p>
-            <a:r>
-              <a:rPr lang="pt-BR" dirty="0"/>
-              <a:t>Compartilhamento de Informação</a:t>
-            </a:r>
-          </a:p>
-        </p:txBody>
-      </p:sp>
-      <p:sp>
-        <p:nvSpPr>
-          <p:cNvPr id="3" name="Espaço Reservado para Texto 2">
-            <a:extLst>
-              <a:ext uri="{FF2B5EF4-FFF2-40B4-BE49-F238E27FC236}">
-                <a16:creationId xmlns:a16="http://schemas.microsoft.com/office/drawing/2014/main" id="{FBD16FD3-9D53-45D5-B860-C07C8A35C030}"/>
-              </a:ext>
-            </a:extLst>
-          </p:cNvPr>
-          <p:cNvSpPr>
-            <a:spLocks noGrp="1"/>
-          </p:cNvSpPr>
-          <p:nvPr>
-            <p:ph type="body" idx="1"/>
-          </p:nvPr>
-        </p:nvSpPr>
-        <p:spPr>
-          <a:xfrm>
-            <a:off x="592347" y="1844675"/>
-            <a:ext cx="11007306" cy="1157143"/>
-          </a:xfrm>
-        </p:spPr>
-        <p:txBody>
-          <a:bodyPr/>
-          <a:lstStyle/>
-          <a:p>
-            <a:r>
-              <a:rPr lang="pt-BR" dirty="0"/>
-              <a:t>O compartilhamento de informação é um processo essencial na era digital, permitindo a troca de dados entre indivíduos, empresas e governos para facilitar a comunicação, a tomada de decisões e a inovação.</a:t>
-            </a:r>
-          </a:p>
-        </p:txBody>
-      </p:sp>
-      <p:pic>
-        <p:nvPicPr>
-          <p:cNvPr id="5" name="Imagem 4">
-            <a:extLst>
-              <a:ext uri="{FF2B5EF4-FFF2-40B4-BE49-F238E27FC236}">
-                <a16:creationId xmlns:a16="http://schemas.microsoft.com/office/drawing/2014/main" id="{B616F070-6F32-461A-A3AA-63546CB8DD06}"/>
-              </a:ext>
-            </a:extLst>
-          </p:cNvPr>
-          <p:cNvPicPr>
-            <a:picLocks noChangeAspect="1"/>
-          </p:cNvPicPr>
-          <p:nvPr/>
-        </p:nvPicPr>
-        <p:blipFill>
-          <a:blip r:embed="rId2"/>
-          <a:stretch>
-            <a:fillRect/>
-          </a:stretch>
-        </p:blipFill>
-        <p:spPr>
-          <a:xfrm>
-            <a:off x="3948545" y="3543500"/>
-            <a:ext cx="4294909" cy="2813260"/>
-          </a:xfrm>
-          <a:prstGeom prst="rect">
-            <a:avLst/>
-          </a:prstGeom>
-        </p:spPr>
-      </p:pic>
-    </p:spTree>
-    <p:extLst>
-      <p:ext uri="{BB962C8B-B14F-4D97-AF65-F5344CB8AC3E}">
-        <p14:creationId xmlns:p14="http://schemas.microsoft.com/office/powerpoint/2010/main" val="936782817"/>
-      </p:ext>
-    </p:extLst>
-  </p:cSld>
-  <p:clrMapOvr>
-    <a:masterClrMapping/>
-  </p:clrMapOvr>
-</p:sld>
-</file>
-
-<file path=ppt/slides/slide9.xml><?xml version="1.0" encoding="utf-8"?>
-<p:sld xmlns:a="http://schemas.openxmlformats.org/drawingml/2006/main" xmlns:r="http://schemas.openxmlformats.org/officeDocument/2006/relationships" xmlns:p="http://schemas.openxmlformats.org/presentationml/2006/main">
-  <p:cSld>
-    <p:spTree>
-      <p:nvGrpSpPr>
-        <p:cNvPr id="1" name=""/>
-        <p:cNvGrpSpPr/>
-        <p:nvPr/>
-      </p:nvGrpSpPr>
-      <p:grpSpPr>
-        <a:xfrm>
-          <a:off x="0" y="0"/>
-          <a:ext cx="0" cy="0"/>
-          <a:chOff x="0" y="0"/>
-          <a:chExt cx="0" cy="0"/>
-        </a:xfrm>
-      </p:grpSpPr>
-      <p:sp>
-        <p:nvSpPr>
-          <p:cNvPr id="2" name="Título 1">
-            <a:extLst>
-              <a:ext uri="{FF2B5EF4-FFF2-40B4-BE49-F238E27FC236}">
-                <a16:creationId xmlns:a16="http://schemas.microsoft.com/office/drawing/2014/main" id="{AEA50EF1-840D-46F3-8108-DC3F463FA65D}"/>
-              </a:ext>
-            </a:extLst>
-          </p:cNvPr>
-          <p:cNvSpPr>
-            <a:spLocks noGrp="1"/>
-          </p:cNvSpPr>
-          <p:nvPr>
-            <p:ph type="title"/>
-          </p:nvPr>
-        </p:nvSpPr>
-        <p:spPr/>
-        <p:txBody>
-          <a:bodyPr/>
-          <a:lstStyle/>
-          <a:p>
-            <a:r>
-              <a:rPr lang="pt-BR" dirty="0"/>
-              <a:t>Classificação da Informação: Proteção e Confidencialidade</a:t>
-            </a:r>
-          </a:p>
-        </p:txBody>
-      </p:sp>
-      <p:sp>
-        <p:nvSpPr>
-          <p:cNvPr id="3" name="Espaço Reservado para Texto 2">
-            <a:extLst>
-              <a:ext uri="{FF2B5EF4-FFF2-40B4-BE49-F238E27FC236}">
-                <a16:creationId xmlns:a16="http://schemas.microsoft.com/office/drawing/2014/main" id="{0F97950C-B256-459A-B0C6-5E30678277FD}"/>
-              </a:ext>
-            </a:extLst>
-          </p:cNvPr>
-          <p:cNvSpPr>
-            <a:spLocks noGrp="1"/>
-          </p:cNvSpPr>
-          <p:nvPr>
-            <p:ph type="body" idx="1"/>
-          </p:nvPr>
-        </p:nvSpPr>
-        <p:spPr/>
-        <p:txBody>
-          <a:bodyPr/>
-          <a:lstStyle/>
-          <a:p>
-            <a:r>
-              <a:rPr lang="pt-BR" dirty="0"/>
-              <a:t>A forma como tratamos, armazenamos e protegemos a informação é essencial para garantirmos sua integridade e evitar danos. A classificação da informação ajuda a manter sua segurança e sigilo conforme sua importância e impacto.</a:t>
-            </a:r>
-          </a:p>
-          <a:p>
-            <a:endParaRPr lang="pt-BR" dirty="0"/>
-          </a:p>
-          <a:p>
-            <a:r>
-              <a:rPr lang="pt-BR" dirty="0"/>
-              <a:t>Classificar a informação consiste em definir um grau de confidencialidade com base no impacto que seu acesso por pessoas não autorizadas pode causar.</a:t>
-            </a:r>
-          </a:p>
-        </p:txBody>
-      </p:sp>
-    </p:spTree>
-    <p:extLst>
-      <p:ext uri="{BB962C8B-B14F-4D97-AF65-F5344CB8AC3E}">
-        <p14:creationId xmlns:p14="http://schemas.microsoft.com/office/powerpoint/2010/main" val="1308221805"/>
       </p:ext>
     </p:extLst>
   </p:cSld>
